--- a/Linux/WSL_Notes.pptx
+++ b/Linux/WSL_Notes.pptx
@@ -8,7 +8,7 @@
     <p:notesMasterId r:id="rId4"/>
   </p:notesMasterIdLst>
   <p:handoutMasterIdLst>
-    <p:handoutMasterId r:id="rId22"/>
+    <p:handoutMasterId r:id="rId21"/>
   </p:handoutMasterIdLst>
   <p:sldIdLst>
     <p:sldId id="256" r:id="rId3"/>
@@ -23,17 +23,16 @@
     <p:sldId id="275" r:id="rId13"/>
     <p:sldId id="259" r:id="rId14"/>
     <p:sldId id="269" r:id="rId15"/>
-    <p:sldId id="304" r:id="rId16"/>
-    <p:sldId id="282" r:id="rId17"/>
-    <p:sldId id="280" r:id="rId18"/>
-    <p:sldId id="286" r:id="rId19"/>
-    <p:sldId id="288" r:id="rId20"/>
-    <p:sldId id="279" r:id="rId21"/>
+    <p:sldId id="280" r:id="rId16"/>
+    <p:sldId id="304" r:id="rId17"/>
+    <p:sldId id="286" r:id="rId18"/>
+    <p:sldId id="288" r:id="rId19"/>
+    <p:sldId id="279" r:id="rId20"/>
   </p:sldIdLst>
   <p:sldSz cx="12192000" cy="6858000"/>
   <p:notesSz cx="6858000" cy="9144000"/>
   <p:custDataLst>
-    <p:tags r:id="rId26"/>
+    <p:tags r:id="rId25"/>
   </p:custDataLst>
   <p:defaultTextStyle>
     <a:defPPr>
@@ -4082,7 +4081,7 @@
           <a:p>
             <a:r>
               <a:rPr lang="en-US" altLang="zh-CN"/>
-              <a:t>USB</a:t>
+              <a:t>Change Swap Size</a:t>
             </a:r>
             <a:endParaRPr lang="en-US" altLang="zh-CN"/>
           </a:p>
@@ -4098,13 +4097,25 @@
             <p:ph idx="1"/>
           </p:nvPr>
         </p:nvSpPr>
-        <p:spPr/>
+        <p:spPr>
+          <a:xfrm>
+            <a:off x="838200" y="1211580"/>
+            <a:ext cx="4709795" cy="4549140"/>
+          </a:xfrm>
+        </p:spPr>
         <p:txBody>
           <a:bodyPr/>
           <a:p>
             <a:r>
               <a:rPr lang="en-US" altLang="zh-CN"/>
-              <a:t>Steps</a:t>
+              <a:t>wsl --shutdown</a:t>
+            </a:r>
+            <a:endParaRPr lang="en-US" altLang="zh-CN"/>
+          </a:p>
+          <a:p>
+            <a:r>
+              <a:rPr lang="en-US" altLang="zh-CN"/>
+              <a:t>Copy .wslconfig to Windows $HOME</a:t>
             </a:r>
             <a:endParaRPr lang="en-US" altLang="zh-CN"/>
           </a:p>
@@ -4112,33 +4123,115 @@
             <a:pPr lvl="1"/>
             <a:r>
               <a:rPr lang="en-US" altLang="zh-CN"/>
-              <a:t>wsl --shutdown</a:t>
-            </a:r>
-            <a:endParaRPr lang="en-US" altLang="zh-CN"/>
-          </a:p>
-          <a:p>
-            <a:pPr lvl="1"/>
-            <a:r>
-              <a:rPr lang="zh-CN" altLang="en-US"/>
-              <a:t>插入</a:t>
-            </a:r>
-            <a:r>
-              <a:rPr lang="en-US" altLang="zh-CN"/>
-              <a:t>U</a:t>
-            </a:r>
-            <a:r>
-              <a:rPr lang="zh-CN" altLang="en-US"/>
-              <a:t>盘</a:t>
-            </a:r>
-            <a:endParaRPr lang="zh-CN" altLang="en-US"/>
-          </a:p>
-          <a:p>
-            <a:pPr lvl="1"/>
-            <a:r>
-              <a:rPr lang="en-US" altLang="zh-CN"/>
-              <a:t>wsl --distribution {Ubuntu20}</a:t>
-            </a:r>
-            <a:endParaRPr lang="en-US" altLang="zh-CN"/>
+              <a:t>C:/Users/{username}/</a:t>
+            </a:r>
+            <a:endParaRPr lang="en-US" altLang="zh-CN"/>
+          </a:p>
+        </p:txBody>
+      </p:sp>
+      <p:sp>
+        <p:nvSpPr>
+          <p:cNvPr id="4" name="文本框 3"/>
+          <p:cNvSpPr txBox="1"/>
+          <p:nvPr/>
+        </p:nvSpPr>
+        <p:spPr>
+          <a:xfrm>
+            <a:off x="6727190" y="1290320"/>
+            <a:ext cx="4626610" cy="4030980"/>
+          </a:xfrm>
+          <a:prstGeom prst="rect">
+            <a:avLst/>
+          </a:prstGeom>
+          <a:noFill/>
+          <a:ln>
+            <a:solidFill>
+              <a:srgbClr val="C00000"/>
+            </a:solidFill>
+          </a:ln>
+        </p:spPr>
+        <p:txBody>
+          <a:bodyPr wrap="square" rtlCol="0">
+            <a:spAutoFit/>
+          </a:bodyPr>
+          <a:p>
+            <a:r>
+              <a:rPr lang="zh-CN" altLang="en-US" sz="1600"/>
+              <a:t># Settings apply across all Linux distros running on WSL 2</a:t>
+            </a:r>
+            <a:endParaRPr lang="zh-CN" altLang="en-US" sz="1600"/>
+          </a:p>
+          <a:p>
+            <a:r>
+              <a:rPr lang="zh-CN" altLang="en-US" sz="1600"/>
+              <a:t># Can see memory in wsl2 with "free -m"</a:t>
+            </a:r>
+            <a:endParaRPr lang="zh-CN" altLang="en-US" sz="1600"/>
+          </a:p>
+          <a:p>
+            <a:r>
+              <a:rPr lang="zh-CN" altLang="en-US" sz="1600"/>
+              <a:t># Goes in windows home directory as .wslconfig</a:t>
+            </a:r>
+            <a:endParaRPr lang="zh-CN" altLang="en-US" sz="1600"/>
+          </a:p>
+          <a:p>
+            <a:r>
+              <a:rPr lang="zh-CN" altLang="en-US" sz="1600"/>
+              <a:t>[wsl2]</a:t>
+            </a:r>
+            <a:endParaRPr lang="zh-CN" altLang="en-US" sz="1600"/>
+          </a:p>
+          <a:p>
+            <a:endParaRPr lang="zh-CN" altLang="en-US" sz="1600"/>
+          </a:p>
+          <a:p>
+            <a:r>
+              <a:rPr lang="zh-CN" altLang="en-US" sz="1600"/>
+              <a:t># Limits VM memory to use no more than 48 GB, defaults to 50% of ram</a:t>
+            </a:r>
+            <a:endParaRPr lang="zh-CN" altLang="en-US" sz="1600"/>
+          </a:p>
+          <a:p>
+            <a:r>
+              <a:rPr lang="zh-CN" altLang="en-US" sz="1600"/>
+              <a:t>memory=48GB</a:t>
+            </a:r>
+            <a:endParaRPr lang="zh-CN" altLang="en-US" sz="1600"/>
+          </a:p>
+          <a:p>
+            <a:endParaRPr lang="zh-CN" altLang="en-US" sz="1600"/>
+          </a:p>
+          <a:p>
+            <a:r>
+              <a:rPr lang="zh-CN" altLang="en-US" sz="1600"/>
+              <a:t># Sets the VM to use 8 virtual processors</a:t>
+            </a:r>
+            <a:endParaRPr lang="zh-CN" altLang="en-US" sz="1600"/>
+          </a:p>
+          <a:p>
+            <a:r>
+              <a:rPr lang="zh-CN" altLang="en-US" sz="1600"/>
+              <a:t>processors=8</a:t>
+            </a:r>
+            <a:endParaRPr lang="zh-CN" altLang="en-US" sz="1600"/>
+          </a:p>
+          <a:p>
+            <a:endParaRPr lang="zh-CN" altLang="en-US" sz="1600"/>
+          </a:p>
+          <a:p>
+            <a:r>
+              <a:rPr lang="zh-CN" altLang="en-US" sz="1600"/>
+              <a:t># Sets the amount of swap storage space to 8GB, default is 25% of available RAM</a:t>
+            </a:r>
+            <a:endParaRPr lang="zh-CN" altLang="en-US" sz="1600"/>
+          </a:p>
+          <a:p>
+            <a:r>
+              <a:rPr lang="zh-CN" altLang="en-US" sz="1600"/>
+              <a:t>swap=16GB</a:t>
+            </a:r>
+            <a:endParaRPr lang="zh-CN" altLang="en-US" sz="1600"/>
           </a:p>
         </p:txBody>
       </p:sp>
@@ -4197,307 +4290,93 @@
         </p:nvSpPr>
         <p:spPr/>
         <p:txBody>
-          <a:bodyPr>
-            <a:normAutofit lnSpcReduction="20000"/>
-          </a:bodyPr>
-          <a:p>
-            <a:r>
-              <a:rPr lang="en-US" altLang="zh-CN">
-                <a:solidFill>
-                  <a:schemeClr val="bg1">
-                    <a:lumMod val="50000"/>
-                  </a:schemeClr>
-                </a:solidFill>
-              </a:rPr>
-              <a:t>References</a:t>
-            </a:r>
-            <a:endParaRPr lang="en-US" altLang="zh-CN">
-              <a:solidFill>
-                <a:schemeClr val="bg1">
-                  <a:lumMod val="50000"/>
-                </a:schemeClr>
-              </a:solidFill>
-            </a:endParaRPr>
+          <a:bodyPr/>
+          <a:p>
+            <a:r>
+              <a:rPr lang="en-US" altLang="zh-CN"/>
+              <a:t>Steps</a:t>
+            </a:r>
+            <a:endParaRPr lang="en-US" altLang="zh-CN"/>
           </a:p>
           <a:p>
             <a:pPr lvl="1"/>
             <a:r>
-              <a:rPr lang="en-US" altLang="zh-CN">
-                <a:solidFill>
-                  <a:schemeClr val="bg1">
-                    <a:lumMod val="50000"/>
-                  </a:schemeClr>
-                </a:solidFill>
-              </a:rPr>
-              <a:t>https://docs.microsoft.com/en-us/windows/wsl/connect-usb</a:t>
-            </a:r>
-            <a:endParaRPr lang="en-US" altLang="zh-CN">
-              <a:solidFill>
-                <a:schemeClr val="bg1">
-                  <a:lumMod val="50000"/>
-                </a:schemeClr>
-              </a:solidFill>
-            </a:endParaRPr>
+              <a:rPr lang="en-US" altLang="zh-CN"/>
+              <a:t>wsl --shutdown</a:t>
+            </a:r>
+            <a:endParaRPr lang="en-US" altLang="zh-CN"/>
+          </a:p>
+          <a:p>
+            <a:pPr lvl="1"/>
+            <a:r>
+              <a:rPr lang="zh-CN" altLang="en-US"/>
+              <a:t>插入</a:t>
+            </a:r>
+            <a:r>
+              <a:rPr lang="en-US" altLang="zh-CN"/>
+              <a:t>U</a:t>
+            </a:r>
+            <a:r>
+              <a:rPr lang="zh-CN" altLang="en-US"/>
+              <a:t>盘</a:t>
+            </a:r>
+            <a:endParaRPr lang="zh-CN" altLang="en-US"/>
+          </a:p>
+          <a:p>
+            <a:pPr lvl="1"/>
+            <a:r>
+              <a:rPr lang="en-US" altLang="zh-CN"/>
+              <a:t>wsl --distribution {Ubuntu20}</a:t>
+            </a:r>
+            <a:endParaRPr lang="en-US" altLang="zh-CN"/>
           </a:p>
           <a:p>
             <a:pPr lvl="0"/>
             <a:r>
-              <a:rPr lang="en-US" altLang="zh-CN">
-                <a:solidFill>
-                  <a:schemeClr val="bg1">
-                    <a:lumMod val="50000"/>
-                  </a:schemeClr>
-                </a:solidFill>
-              </a:rPr>
-              <a:t>Steps</a:t>
-            </a:r>
-            <a:endParaRPr lang="en-US" altLang="zh-CN">
-              <a:solidFill>
-                <a:schemeClr val="bg1">
-                  <a:lumMod val="50000"/>
-                </a:schemeClr>
-              </a:solidFill>
-            </a:endParaRPr>
+              <a:rPr lang="en-US" altLang="zh-CN"/>
+              <a:t>Protocols</a:t>
+            </a:r>
+            <a:endParaRPr lang="en-US" altLang="zh-CN"/>
           </a:p>
           <a:p>
             <a:pPr lvl="1"/>
             <a:r>
-              <a:rPr lang="en-US" altLang="zh-CN">
-                <a:solidFill>
-                  <a:schemeClr val="bg1">
-                    <a:lumMod val="50000"/>
-                  </a:schemeClr>
-                </a:solidFill>
-              </a:rPr>
-              <a:t>download and install windows support</a:t>
-            </a:r>
-            <a:endParaRPr lang="en-US" altLang="zh-CN">
-              <a:solidFill>
-                <a:schemeClr val="bg1">
-                  <a:lumMod val="50000"/>
-                </a:schemeClr>
-              </a:solidFill>
-            </a:endParaRPr>
+              <a:rPr lang="en-US" altLang="zh-CN"/>
+              <a:t>MTP (Media Transfer Protocol)</a:t>
+            </a:r>
+            <a:endParaRPr lang="en-US" altLang="zh-CN"/>
           </a:p>
           <a:p>
             <a:pPr lvl="2"/>
             <a:r>
-              <a:rPr lang="en-US" altLang="zh-CN">
-                <a:solidFill>
-                  <a:schemeClr val="bg1">
-                    <a:lumMod val="50000"/>
-                  </a:schemeClr>
-                </a:solidFill>
-              </a:rPr>
-              <a:t>https://github.com/dorssel/usbipd-win/releases</a:t>
-            </a:r>
-            <a:endParaRPr lang="en-US" altLang="zh-CN">
-              <a:solidFill>
-                <a:schemeClr val="bg1">
-                  <a:lumMod val="50000"/>
-                </a:schemeClr>
-              </a:solidFill>
-            </a:endParaRPr>
+              <a:rPr lang="en-US" altLang="zh-CN" sz="1800"/>
+              <a:t>based on PTP</a:t>
+            </a:r>
+            <a:endParaRPr lang="en-US" altLang="zh-CN" sz="1800"/>
           </a:p>
           <a:p>
             <a:pPr lvl="2"/>
             <a:r>
-              <a:rPr lang="en-US" altLang="zh-CN">
-                <a:solidFill>
-                  <a:schemeClr val="bg1">
-                    <a:lumMod val="50000"/>
-                  </a:schemeClr>
-                </a:solidFill>
-              </a:rPr>
-              <a:t>winget install --interactive --exact dorssel.usbipd-win</a:t>
-            </a:r>
-            <a:endParaRPr lang="en-US" altLang="zh-CN">
-              <a:solidFill>
-                <a:schemeClr val="bg1">
-                  <a:lumMod val="50000"/>
-                </a:schemeClr>
-              </a:solidFill>
-            </a:endParaRPr>
+              <a:rPr lang="en-US" altLang="zh-CN" sz="1800"/>
+              <a:t>add more extensions</a:t>
+            </a:r>
+            <a:endParaRPr lang="zh-CN" altLang="en-US"/>
           </a:p>
           <a:p>
             <a:pPr lvl="1"/>
             <a:r>
-              <a:rPr lang="en-US" altLang="zh-CN">
-                <a:solidFill>
-                  <a:schemeClr val="bg1">
-                    <a:lumMod val="50000"/>
-                  </a:schemeClr>
-                </a:solidFill>
-              </a:rPr>
-              <a:t>install tools in Linux</a:t>
-            </a:r>
-            <a:endParaRPr lang="en-US" altLang="zh-CN">
-              <a:solidFill>
-                <a:schemeClr val="bg1">
-                  <a:lumMod val="50000"/>
-                </a:schemeClr>
-              </a:solidFill>
-            </a:endParaRPr>
+              <a:rPr lang="en-US" altLang="zh-CN"/>
+              <a:t>PTP (Picture Transfer Protocl)</a:t>
+            </a:r>
+            <a:endParaRPr lang="en-US" altLang="zh-CN"/>
           </a:p>
           <a:p>
             <a:pPr lvl="2"/>
             <a:r>
-              <a:rPr lang="en-US" altLang="zh-CN">
-                <a:solidFill>
-                  <a:schemeClr val="bg1">
-                    <a:lumMod val="50000"/>
-                  </a:schemeClr>
-                </a:solidFill>
-              </a:rPr>
-              <a:t>sudo apt install linux-tools-5.4.0-77-generic hwdata</a:t>
-            </a:r>
-            <a:endParaRPr lang="en-US" altLang="zh-CN">
-              <a:solidFill>
-                <a:schemeClr val="bg1">
-                  <a:lumMod val="50000"/>
-                </a:schemeClr>
-              </a:solidFill>
-            </a:endParaRPr>
-          </a:p>
-          <a:p>
-            <a:pPr lvl="2"/>
-            <a:r>
-              <a:rPr lang="en-US" altLang="zh-CN">
-                <a:solidFill>
-                  <a:schemeClr val="bg1">
-                    <a:lumMod val="50000"/>
-                  </a:schemeClr>
-                </a:solidFill>
-              </a:rPr>
-              <a:t>sudo update-alternatives --install /usr/local/bin/usbip usbip /usr/lib/linux-tools/5.4.0-77-generic/usbip 20</a:t>
-            </a:r>
-            <a:endParaRPr lang="en-US" altLang="zh-CN">
-              <a:solidFill>
-                <a:schemeClr val="bg1">
-                  <a:lumMod val="50000"/>
-                </a:schemeClr>
-              </a:solidFill>
-            </a:endParaRPr>
-          </a:p>
-          <a:p>
-            <a:pPr lvl="1"/>
-            <a:r>
-              <a:rPr lang="en-US" altLang="zh-CN">
-                <a:solidFill>
-                  <a:schemeClr val="bg1">
-                    <a:lumMod val="50000"/>
-                  </a:schemeClr>
-                </a:solidFill>
-              </a:rPr>
-              <a:t>Connect</a:t>
-            </a:r>
-            <a:endParaRPr lang="en-US" altLang="zh-CN">
-              <a:solidFill>
-                <a:schemeClr val="bg1">
-                  <a:lumMod val="50000"/>
-                </a:schemeClr>
-              </a:solidFill>
-            </a:endParaRPr>
-          </a:p>
-          <a:p>
-            <a:pPr lvl="2"/>
-            <a:r>
-              <a:rPr lang="en-US" altLang="zh-CN">
-                <a:solidFill>
-                  <a:schemeClr val="bg1">
-                    <a:lumMod val="50000"/>
-                  </a:schemeClr>
-                </a:solidFill>
-              </a:rPr>
-              <a:t>Windows</a:t>
-            </a:r>
-            <a:endParaRPr lang="en-US" altLang="zh-CN">
-              <a:solidFill>
-                <a:schemeClr val="bg1">
-                  <a:lumMod val="50000"/>
-                </a:schemeClr>
-              </a:solidFill>
-            </a:endParaRPr>
-          </a:p>
-          <a:p>
-            <a:pPr lvl="3"/>
-            <a:r>
-              <a:rPr lang="en-US" altLang="zh-CN">
-                <a:solidFill>
-                  <a:schemeClr val="bg1">
-                    <a:lumMod val="50000"/>
-                  </a:schemeClr>
-                </a:solidFill>
-              </a:rPr>
-              <a:t>usbipd wsl list</a:t>
-            </a:r>
-            <a:endParaRPr lang="en-US" altLang="zh-CN">
-              <a:solidFill>
-                <a:schemeClr val="bg1">
-                  <a:lumMod val="50000"/>
-                </a:schemeClr>
-              </a:solidFill>
-            </a:endParaRPr>
-          </a:p>
-          <a:p>
-            <a:pPr lvl="3"/>
-            <a:r>
-              <a:rPr lang="en-US" altLang="zh-CN">
-                <a:solidFill>
-                  <a:schemeClr val="bg1">
-                    <a:lumMod val="50000"/>
-                  </a:schemeClr>
-                </a:solidFill>
-              </a:rPr>
-              <a:t>usbipd wsl attach --busid &lt;busid&gt;</a:t>
-            </a:r>
-            <a:endParaRPr lang="en-US" altLang="zh-CN">
-              <a:solidFill>
-                <a:schemeClr val="bg1">
-                  <a:lumMod val="50000"/>
-                </a:schemeClr>
-              </a:solidFill>
-            </a:endParaRPr>
-          </a:p>
-          <a:p>
-            <a:pPr lvl="2"/>
-            <a:r>
-              <a:rPr lang="en-US" altLang="zh-CN">
-                <a:solidFill>
-                  <a:schemeClr val="bg1">
-                    <a:lumMod val="50000"/>
-                  </a:schemeClr>
-                </a:solidFill>
-              </a:rPr>
-              <a:t>Linux</a:t>
-            </a:r>
-            <a:endParaRPr lang="en-US" altLang="zh-CN">
-              <a:solidFill>
-                <a:schemeClr val="bg1">
-                  <a:lumMod val="50000"/>
-                </a:schemeClr>
-              </a:solidFill>
-            </a:endParaRPr>
-          </a:p>
-          <a:p>
-            <a:pPr lvl="3"/>
-            <a:r>
-              <a:rPr lang="en-US" altLang="zh-CN">
-                <a:solidFill>
-                  <a:schemeClr val="bg1">
-                    <a:lumMod val="50000"/>
-                  </a:schemeClr>
-                </a:solidFill>
-              </a:rPr>
-              <a:t>lsusb</a:t>
-            </a:r>
-            <a:endParaRPr lang="en-US" altLang="zh-CN">
-              <a:solidFill>
-                <a:schemeClr val="bg1">
-                  <a:lumMod val="50000"/>
-                </a:schemeClr>
-              </a:solidFill>
-            </a:endParaRPr>
+              <a:rPr lang="zh-CN" altLang="en-US"/>
+              <a:t>挂载为数码相机</a:t>
+            </a:r>
+            <a:endParaRPr lang="zh-CN" altLang="en-US"/>
           </a:p>
         </p:txBody>
       </p:sp>
@@ -4538,7 +4417,7 @@
           <a:p>
             <a:r>
               <a:rPr lang="en-US" altLang="zh-CN"/>
-              <a:t>Change Swap Size</a:t>
+              <a:t>Support USB Devices</a:t>
             </a:r>
             <a:endParaRPr lang="en-US" altLang="zh-CN"/>
           </a:p>
@@ -4557,144 +4436,162 @@
         <p:spPr>
           <a:xfrm>
             <a:off x="838200" y="1211580"/>
-            <a:ext cx="4709795" cy="4549140"/>
+            <a:ext cx="5812790" cy="4549140"/>
           </a:xfrm>
         </p:spPr>
         <p:txBody>
-          <a:bodyPr/>
-          <a:p>
-            <a:r>
-              <a:rPr lang="en-US" altLang="zh-CN"/>
-              <a:t>wsl --shutdown</a:t>
-            </a:r>
-            <a:endParaRPr lang="en-US" altLang="zh-CN"/>
-          </a:p>
-          <a:p>
-            <a:r>
-              <a:rPr lang="en-US" altLang="zh-CN"/>
-              <a:t>Copy .wslconfig to Windows $HOME</a:t>
+          <a:bodyPr>
+            <a:normAutofit lnSpcReduction="20000"/>
+          </a:bodyPr>
+          <a:p>
+            <a:r>
+              <a:rPr lang="en-US" altLang="zh-CN"/>
+              <a:t>References</a:t>
             </a:r>
             <a:endParaRPr lang="en-US" altLang="zh-CN"/>
           </a:p>
           <a:p>
             <a:pPr lvl="1"/>
             <a:r>
-              <a:rPr lang="en-US" altLang="zh-CN"/>
-              <a:t>C:/Users/{username}/</a:t>
-            </a:r>
-            <a:endParaRPr lang="en-US" altLang="zh-CN"/>
-          </a:p>
-        </p:txBody>
-      </p:sp>
-      <p:sp>
-        <p:nvSpPr>
-          <p:cNvPr id="4" name="文本框 3"/>
-          <p:cNvSpPr txBox="1"/>
+              <a:rPr lang="en-US" altLang="zh-CN">
+                <a:solidFill>
+                  <a:schemeClr val="tx1"/>
+                </a:solidFill>
+                <a:sym typeface="+mn-ea"/>
+              </a:rPr>
+              <a:t>https://docs.microsoft.com/en-us/windows/wsl/connect-usb</a:t>
+            </a:r>
+            <a:endParaRPr lang="en-US" altLang="zh-CN">
+              <a:solidFill>
+                <a:schemeClr val="tx1"/>
+              </a:solidFill>
+            </a:endParaRPr>
+          </a:p>
+          <a:p>
+            <a:pPr lvl="1"/>
+            <a:r>
+              <a:rPr lang="en-US" altLang="zh-CN"/>
+              <a:t>https://github.com/dorssel/usbipd-win</a:t>
+            </a:r>
+            <a:endParaRPr lang="en-US" altLang="zh-CN"/>
+          </a:p>
+          <a:p>
+            <a:pPr lvl="1"/>
+            <a:r>
+              <a:rPr lang="en-US" altLang="zh-CN"/>
+              <a:t>https://zhuanlan.zhihu.com/p/529559033</a:t>
+            </a:r>
+            <a:endParaRPr lang="en-US" altLang="zh-CN"/>
+          </a:p>
+          <a:p>
+            <a:pPr lvl="0"/>
+            <a:r>
+              <a:rPr lang="en-US" altLang="zh-CN"/>
+              <a:t>Steps</a:t>
+            </a:r>
+            <a:endParaRPr lang="en-US" altLang="zh-CN"/>
+          </a:p>
+          <a:p>
+            <a:pPr lvl="1"/>
+            <a:r>
+              <a:rPr lang="en-US" altLang="zh-CN"/>
+              <a:t>Windows</a:t>
+            </a:r>
+            <a:endParaRPr lang="en-US" altLang="zh-CN"/>
+          </a:p>
+          <a:p>
+            <a:pPr lvl="2"/>
+            <a:r>
+              <a:rPr lang="en-US" altLang="zh-CN"/>
+              <a:t>winget install --interactive --exact dorssel.usbipd-win</a:t>
+            </a:r>
+            <a:endParaRPr lang="en-US" altLang="zh-CN"/>
+          </a:p>
+          <a:p>
+            <a:pPr lvl="2"/>
+            <a:r>
+              <a:rPr lang="en-US" altLang="zh-CN"/>
+              <a:t>re-launch Windows PowerShell</a:t>
+            </a:r>
+            <a:endParaRPr lang="en-US" altLang="zh-CN"/>
+          </a:p>
+          <a:p>
+            <a:pPr lvl="2"/>
+            <a:r>
+              <a:rPr lang="en-US" altLang="zh-CN"/>
+              <a:t>usbipd list</a:t>
+            </a:r>
+            <a:endParaRPr lang="en-US" altLang="zh-CN"/>
+          </a:p>
+          <a:p>
+            <a:pPr lvl="2"/>
+            <a:r>
+              <a:rPr lang="en-US" altLang="zh-CN"/>
+              <a:t>usbipd bind --busid=&lt;BUSID&gt;</a:t>
+            </a:r>
+            <a:endParaRPr lang="en-US" altLang="zh-CN"/>
+          </a:p>
+          <a:p>
+            <a:pPr lvl="2"/>
+            <a:r>
+              <a:rPr lang="en-US" altLang="zh-CN"/>
+              <a:t>usbipd attach --wsl --busid &lt;busid&gt;</a:t>
+            </a:r>
+            <a:endParaRPr lang="en-US" altLang="zh-CN"/>
+          </a:p>
+          <a:p>
+            <a:pPr lvl="2"/>
+            <a:r>
+              <a:rPr lang="en-US" altLang="zh-CN"/>
+              <a:t>usbipd detach --busid &lt;busid&gt;</a:t>
+            </a:r>
+            <a:endParaRPr lang="en-US" altLang="zh-CN"/>
+          </a:p>
+          <a:p>
+            <a:pPr lvl="1"/>
+            <a:r>
+              <a:rPr lang="en-US" altLang="zh-CN"/>
+              <a:t>WSL2</a:t>
+            </a:r>
+            <a:endParaRPr lang="en-US" altLang="zh-CN"/>
+          </a:p>
+          <a:p>
+            <a:pPr lvl="2"/>
+            <a:r>
+              <a:rPr lang="en-US" altLang="zh-CN"/>
+              <a:t>lsusb</a:t>
+            </a:r>
+            <a:endParaRPr lang="en-US" altLang="zh-CN"/>
+          </a:p>
+        </p:txBody>
+      </p:sp>
+      <p:pic>
+        <p:nvPicPr>
+          <p:cNvPr id="4" name="图片 3"/>
+          <p:cNvPicPr>
+            <a:picLocks noChangeAspect="1"/>
+          </p:cNvPicPr>
           <p:nvPr/>
-        </p:nvSpPr>
+        </p:nvPicPr>
+        <p:blipFill>
+          <a:blip r:embed="rId1"/>
+          <a:stretch>
+            <a:fillRect/>
+          </a:stretch>
+        </p:blipFill>
         <p:spPr>
           <a:xfrm>
-            <a:off x="6727190" y="1290320"/>
-            <a:ext cx="4626610" cy="4030980"/>
+            <a:off x="6483350" y="1083310"/>
+            <a:ext cx="5422265" cy="859790"/>
           </a:xfrm>
           <a:prstGeom prst="rect">
             <a:avLst/>
           </a:prstGeom>
-          <a:noFill/>
-          <a:ln>
-            <a:solidFill>
-              <a:srgbClr val="C00000"/>
-            </a:solidFill>
-          </a:ln>
         </p:spPr>
-        <p:txBody>
-          <a:bodyPr wrap="square" rtlCol="0">
-            <a:spAutoFit/>
-          </a:bodyPr>
-          <a:p>
-            <a:r>
-              <a:rPr lang="zh-CN" altLang="en-US" sz="1600"/>
-              <a:t># Settings apply across all Linux distros running on WSL 2</a:t>
-            </a:r>
-            <a:endParaRPr lang="zh-CN" altLang="en-US" sz="1600"/>
-          </a:p>
-          <a:p>
-            <a:r>
-              <a:rPr lang="zh-CN" altLang="en-US" sz="1600"/>
-              <a:t># Can see memory in wsl2 with "free -m"</a:t>
-            </a:r>
-            <a:endParaRPr lang="zh-CN" altLang="en-US" sz="1600"/>
-          </a:p>
-          <a:p>
-            <a:r>
-              <a:rPr lang="zh-CN" altLang="en-US" sz="1600"/>
-              <a:t># Goes in windows home directory as .wslconfig</a:t>
-            </a:r>
-            <a:endParaRPr lang="zh-CN" altLang="en-US" sz="1600"/>
-          </a:p>
-          <a:p>
-            <a:r>
-              <a:rPr lang="zh-CN" altLang="en-US" sz="1600"/>
-              <a:t>[wsl2]</a:t>
-            </a:r>
-            <a:endParaRPr lang="zh-CN" altLang="en-US" sz="1600"/>
-          </a:p>
-          <a:p>
-            <a:endParaRPr lang="zh-CN" altLang="en-US" sz="1600"/>
-          </a:p>
-          <a:p>
-            <a:r>
-              <a:rPr lang="zh-CN" altLang="en-US" sz="1600"/>
-              <a:t># Limits VM memory to use no more than 48 GB, defaults to 50% of ram</a:t>
-            </a:r>
-            <a:endParaRPr lang="zh-CN" altLang="en-US" sz="1600"/>
-          </a:p>
-          <a:p>
-            <a:r>
-              <a:rPr lang="zh-CN" altLang="en-US" sz="1600"/>
-              <a:t>memory=48GB</a:t>
-            </a:r>
-            <a:endParaRPr lang="zh-CN" altLang="en-US" sz="1600"/>
-          </a:p>
-          <a:p>
-            <a:endParaRPr lang="zh-CN" altLang="en-US" sz="1600"/>
-          </a:p>
-          <a:p>
-            <a:r>
-              <a:rPr lang="zh-CN" altLang="en-US" sz="1600"/>
-              <a:t># Sets the VM to use 8 virtual processors</a:t>
-            </a:r>
-            <a:endParaRPr lang="zh-CN" altLang="en-US" sz="1600"/>
-          </a:p>
-          <a:p>
-            <a:r>
-              <a:rPr lang="zh-CN" altLang="en-US" sz="1600"/>
-              <a:t>processors=8</a:t>
-            </a:r>
-            <a:endParaRPr lang="zh-CN" altLang="en-US" sz="1600"/>
-          </a:p>
-          <a:p>
-            <a:endParaRPr lang="zh-CN" altLang="en-US" sz="1600"/>
-          </a:p>
-          <a:p>
-            <a:r>
-              <a:rPr lang="zh-CN" altLang="en-US" sz="1600"/>
-              <a:t># Sets the amount of swap storage space to 8GB, default is 25% of available RAM</a:t>
-            </a:r>
-            <a:endParaRPr lang="zh-CN" altLang="en-US" sz="1600"/>
-          </a:p>
-          <a:p>
-            <a:r>
-              <a:rPr lang="zh-CN" altLang="en-US" sz="1600"/>
-              <a:t>swap=16GB</a:t>
-            </a:r>
-            <a:endParaRPr lang="zh-CN" altLang="en-US" sz="1600"/>
-          </a:p>
-        </p:txBody>
-      </p:sp>
+      </p:pic>
     </p:spTree>
     <p:custDataLst>
-      <p:tags r:id="rId1"/>
+      <p:tags r:id="rId2"/>
     </p:custDataLst>
   </p:cSld>
   <p:clrMapOvr>
@@ -4729,7 +4626,7 @@
           <a:p>
             <a:r>
               <a:rPr lang="en-US" altLang="zh-CN"/>
-              <a:t>Support USB Disk</a:t>
+              <a:t>Back and Move</a:t>
             </a:r>
             <a:endParaRPr lang="en-US" altLang="zh-CN"/>
           </a:p>
@@ -4751,7 +4648,7 @@
           <a:p>
             <a:r>
               <a:rPr lang="en-US" altLang="zh-CN"/>
-              <a:t>References</a:t>
+              <a:t>Export</a:t>
             </a:r>
             <a:endParaRPr lang="en-US" altLang="zh-CN"/>
           </a:p>
@@ -4759,15 +4656,47 @@
             <a:pPr lvl="1"/>
             <a:r>
               <a:rPr lang="en-US" altLang="zh-CN"/>
-              <a:t>https://github.com/dorssel/usbipd-win</a:t>
+              <a:t>wsl --list --verbose	// get linux distribution name</a:t>
+            </a:r>
+            <a:endParaRPr lang="en-US" altLang="zh-CN"/>
+          </a:p>
+          <a:p>
+            <a:pPr lvl="1"/>
+            <a:r>
+              <a:rPr lang="en-US" altLang="zh-CN"/>
+              <a:t>wsl --shutdown</a:t>
+            </a:r>
+            <a:endParaRPr lang="en-US" altLang="zh-CN"/>
+          </a:p>
+          <a:p>
+            <a:pPr lvl="1"/>
+            <a:r>
+              <a:rPr lang="en-US" altLang="zh-CN"/>
+              <a:t>mkdir D:\backup</a:t>
+            </a:r>
+            <a:endParaRPr lang="en-US" altLang="zh-CN"/>
+          </a:p>
+          <a:p>
+            <a:pPr lvl="1"/>
+            <a:r>
+              <a:rPr lang="en-US" altLang="zh-CN"/>
+              <a:t>wsl --export {Ubuntu-18.04} D:\backup\ubuntu-18.04.tar</a:t>
+            </a:r>
+            <a:endParaRPr lang="en-US" altLang="zh-CN"/>
+          </a:p>
+          <a:p>
+            <a:pPr lvl="1"/>
+            <a:r>
+              <a:rPr lang="en-US" altLang="zh-CN"/>
+              <a:t>wsl --unregister {Ubuntu-18.04}</a:t>
             </a:r>
             <a:endParaRPr lang="en-US" altLang="zh-CN"/>
           </a:p>
           <a:p>
             <a:pPr lvl="0"/>
             <a:r>
-              <a:rPr lang="en-US" altLang="zh-CN"/>
-              <a:t>Steps</a:t>
+              <a:rPr lang="en-US" altLang="zh-CN" sz="2400"/>
+              <a:t>Import</a:t>
             </a:r>
             <a:endParaRPr lang="en-US" altLang="zh-CN"/>
           </a:p>
@@ -4775,31 +4704,7 @@
             <a:pPr lvl="1"/>
             <a:r>
               <a:rPr lang="en-US" altLang="zh-CN"/>
-              <a:t>Windows</a:t>
-            </a:r>
-            <a:endParaRPr lang="en-US" altLang="zh-CN"/>
-          </a:p>
-          <a:p>
-            <a:pPr lvl="2"/>
-            <a:r>
-              <a:rPr lang="en-US" altLang="zh-CN"/>
-              <a:t>winget install usbipd</a:t>
-            </a:r>
-            <a:endParaRPr lang="en-US" altLang="zh-CN"/>
-          </a:p>
-          <a:p>
-            <a:pPr lvl="2"/>
-            <a:r>
-              <a:rPr lang="en-US" altLang="zh-CN"/>
-              <a:t>usbipd list</a:t>
-            </a:r>
-            <a:endParaRPr lang="en-US" altLang="zh-CN"/>
-          </a:p>
-          <a:p>
-            <a:pPr lvl="2"/>
-            <a:r>
-              <a:rPr lang="en-US" altLang="zh-CN"/>
-              <a:t>usbipd bind --busid=&lt;BUSID&gt;</a:t>
+              <a:t>mkdir D:\WSL\</a:t>
             </a:r>
             <a:endParaRPr lang="en-US" altLang="zh-CN"/>
           </a:p>
@@ -4807,31 +4712,31 @@
             <a:pPr lvl="1"/>
             <a:r>
               <a:rPr lang="en-US" altLang="zh-CN"/>
-              <a:t>WSL2</a:t>
-            </a:r>
-            <a:endParaRPr lang="en-US" altLang="zh-CN"/>
-          </a:p>
-          <a:p>
-            <a:pPr lvl="2"/>
-            <a:r>
-              <a:rPr lang="en-US" altLang="zh-CN"/>
-              <a:t>sudo apt install linux-tools-common</a:t>
-            </a:r>
-            <a:endParaRPr lang="en-US" altLang="zh-CN"/>
-          </a:p>
-          <a:p>
-            <a:pPr lvl="2"/>
-            <a:r>
-              <a:rPr lang="en-US" altLang="zh-CN"/>
-              <a:t>usbipd wsl list</a:t>
-            </a:r>
-            <a:endParaRPr lang="en-US" altLang="zh-CN"/>
-          </a:p>
-          <a:p>
-            <a:pPr lvl="2"/>
-            <a:r>
-              <a:rPr lang="en-US" altLang="zh-CN"/>
-              <a:t>usbipd wsl attach --busid=&lt;BUSID&gt;</a:t>
+              <a:t>wsl --import {Ubuntu-18.04} D:\WSL\ D:\backup\ubuntu-18.04.tar</a:t>
+            </a:r>
+            <a:endParaRPr lang="en-US" altLang="zh-CN"/>
+          </a:p>
+          <a:p>
+            <a:pPr lvl="1"/>
+            <a:r>
+              <a:rPr lang="en-US" altLang="zh-CN"/>
+              <a:t>cd $env:USERPROFILE\AppData\Local\Microsoft\WindowsApps</a:t>
+            </a:r>
+            <a:endParaRPr lang="en-US" altLang="zh-CN"/>
+          </a:p>
+          <a:p>
+            <a:pPr lvl="1"/>
+            <a:r>
+              <a:rPr lang="en-US" altLang="zh-CN"/>
+              <a:t>.\ubuntu1804.exe config --default-user lgm</a:t>
+            </a:r>
+            <a:endParaRPr lang="en-US" altLang="zh-CN"/>
+          </a:p>
+          <a:p>
+            <a:pPr lvl="1"/>
+            <a:r>
+              <a:rPr lang="en-US" altLang="zh-CN"/>
+              <a:t>wsl --distribution {Ubuntu-18.04}</a:t>
             </a:r>
             <a:endParaRPr lang="en-US" altLang="zh-CN"/>
           </a:p>
@@ -4874,159 +4779,6 @@
           <a:p>
             <a:r>
               <a:rPr lang="en-US" altLang="zh-CN"/>
-              <a:t>Back and Move</a:t>
-            </a:r>
-            <a:endParaRPr lang="en-US" altLang="zh-CN"/>
-          </a:p>
-        </p:txBody>
-      </p:sp>
-      <p:sp>
-        <p:nvSpPr>
-          <p:cNvPr id="3" name="内容占位符 2"/>
-          <p:cNvSpPr>
-            <a:spLocks noGrp="1"/>
-          </p:cNvSpPr>
-          <p:nvPr>
-            <p:ph idx="1"/>
-          </p:nvPr>
-        </p:nvSpPr>
-        <p:spPr/>
-        <p:txBody>
-          <a:bodyPr/>
-          <a:p>
-            <a:r>
-              <a:rPr lang="en-US" altLang="zh-CN"/>
-              <a:t>Export</a:t>
-            </a:r>
-            <a:endParaRPr lang="en-US" altLang="zh-CN"/>
-          </a:p>
-          <a:p>
-            <a:pPr lvl="1"/>
-            <a:r>
-              <a:rPr lang="en-US" altLang="zh-CN"/>
-              <a:t>wsl --list --verbose	// get linux distribution name</a:t>
-            </a:r>
-            <a:endParaRPr lang="en-US" altLang="zh-CN"/>
-          </a:p>
-          <a:p>
-            <a:pPr lvl="1"/>
-            <a:r>
-              <a:rPr lang="en-US" altLang="zh-CN"/>
-              <a:t>wsl --shutdown</a:t>
-            </a:r>
-            <a:endParaRPr lang="en-US" altLang="zh-CN"/>
-          </a:p>
-          <a:p>
-            <a:pPr lvl="1"/>
-            <a:r>
-              <a:rPr lang="en-US" altLang="zh-CN"/>
-              <a:t>mkdir D:\backup</a:t>
-            </a:r>
-            <a:endParaRPr lang="en-US" altLang="zh-CN"/>
-          </a:p>
-          <a:p>
-            <a:pPr lvl="1"/>
-            <a:r>
-              <a:rPr lang="en-US" altLang="zh-CN"/>
-              <a:t>wsl --export {Ubuntu-18.04} D:\backup\ubuntu-18.04.tar</a:t>
-            </a:r>
-            <a:endParaRPr lang="en-US" altLang="zh-CN"/>
-          </a:p>
-          <a:p>
-            <a:pPr lvl="1"/>
-            <a:r>
-              <a:rPr lang="en-US" altLang="zh-CN"/>
-              <a:t>wsl --unregister {Ubuntu-18.04}</a:t>
-            </a:r>
-            <a:endParaRPr lang="en-US" altLang="zh-CN"/>
-          </a:p>
-          <a:p>
-            <a:pPr lvl="0"/>
-            <a:r>
-              <a:rPr lang="en-US" altLang="zh-CN" sz="2400"/>
-              <a:t>Import</a:t>
-            </a:r>
-            <a:endParaRPr lang="en-US" altLang="zh-CN"/>
-          </a:p>
-          <a:p>
-            <a:pPr lvl="1"/>
-            <a:r>
-              <a:rPr lang="en-US" altLang="zh-CN"/>
-              <a:t>mkdir D:\WSL\</a:t>
-            </a:r>
-            <a:endParaRPr lang="en-US" altLang="zh-CN"/>
-          </a:p>
-          <a:p>
-            <a:pPr lvl="1"/>
-            <a:r>
-              <a:rPr lang="en-US" altLang="zh-CN"/>
-              <a:t>wsl --import {Ubuntu-18.04} D:\WSL\ D:\backup\ubuntu-18.04.tar</a:t>
-            </a:r>
-            <a:endParaRPr lang="en-US" altLang="zh-CN"/>
-          </a:p>
-          <a:p>
-            <a:pPr lvl="1"/>
-            <a:r>
-              <a:rPr lang="en-US" altLang="zh-CN"/>
-              <a:t>cd $env:USERPROFILE\AppData\Local\Microsoft\WindowsApps</a:t>
-            </a:r>
-            <a:endParaRPr lang="en-US" altLang="zh-CN"/>
-          </a:p>
-          <a:p>
-            <a:pPr lvl="1"/>
-            <a:r>
-              <a:rPr lang="en-US" altLang="zh-CN"/>
-              <a:t>.\ubuntu1804.exe config --default-user lgm</a:t>
-            </a:r>
-            <a:endParaRPr lang="en-US" altLang="zh-CN"/>
-          </a:p>
-          <a:p>
-            <a:pPr lvl="1"/>
-            <a:r>
-              <a:rPr lang="en-US" altLang="zh-CN"/>
-              <a:t>wsl --distribution {Ubuntu-18.04}</a:t>
-            </a:r>
-            <a:endParaRPr lang="en-US" altLang="zh-CN"/>
-          </a:p>
-        </p:txBody>
-      </p:sp>
-    </p:spTree>
-    <p:custDataLst>
-      <p:tags r:id="rId1"/>
-    </p:custDataLst>
-  </p:cSld>
-  <p:clrMapOvr>
-    <a:masterClrMapping/>
-  </p:clrMapOvr>
-</p:sld>
-</file>
-
-<file path=ppt/slides/slide18.xml><?xml version="1.0" encoding="utf-8"?>
-<p:sld xmlns:a="http://schemas.openxmlformats.org/drawingml/2006/main" xmlns:r="http://schemas.openxmlformats.org/officeDocument/2006/relationships" xmlns:p="http://schemas.openxmlformats.org/presentationml/2006/main">
-  <p:cSld>
-    <p:spTree>
-      <p:nvGrpSpPr>
-        <p:cNvPr id="1" name=""/>
-        <p:cNvGrpSpPr/>
-        <p:nvPr/>
-      </p:nvGrpSpPr>
-      <p:grpSpPr/>
-      <p:sp>
-        <p:nvSpPr>
-          <p:cNvPr id="2" name="标题 1"/>
-          <p:cNvSpPr>
-            <a:spLocks noGrp="1"/>
-          </p:cNvSpPr>
-          <p:nvPr>
-            <p:ph type="title"/>
-          </p:nvPr>
-        </p:nvSpPr>
-        <p:spPr/>
-        <p:txBody>
-          <a:bodyPr/>
-          <a:p>
-            <a:r>
-              <a:rPr lang="en-US" altLang="zh-CN"/>
               <a:t>FAQ</a:t>
             </a:r>
             <a:endParaRPr lang="en-US" altLang="zh-CN"/>
@@ -5154,6 +4906,13 @@
           <a:p>
             <a:r>
               <a:rPr lang="zh-CN" altLang="en-US"/>
+              <a:t>https://learn.microsoft.com/en-us/windows/wsl/</a:t>
+            </a:r>
+            <a:endParaRPr lang="zh-CN" altLang="en-US"/>
+          </a:p>
+          <a:p>
+            <a:r>
+              <a:rPr lang="zh-CN" altLang="en-US"/>
               <a:t>https://github.com/QMonkey/wsl-tutorial</a:t>
             </a:r>
             <a:endParaRPr lang="zh-CN" altLang="en-US"/>
@@ -5453,7 +5212,7 @@
         </p:nvGraphicFramePr>
         <p:xfrm>
           <a:off x="914400" y="1276350"/>
-          <a:ext cx="10439400" cy="3385820"/>
+          <a:ext cx="10439400" cy="4322445"/>
         </p:xfrm>
         <a:graphic>
           <a:graphicData uri="http://schemas.openxmlformats.org/drawingml/2006/table">
@@ -5698,6 +5457,52 @@
                   <a:tcPr anchor="ctr" anchorCtr="0"/>
                 </a:tc>
               </a:tr>
+              <a:tr h="617855">
+                <a:tc>
+                  <a:txBody>
+                    <a:bodyPr/>
+                    <a:p>
+                      <a:pPr>
+                        <a:buNone/>
+                      </a:pPr>
+                      <a:r>
+                        <a:rPr lang="zh-CN" altLang="en-US"/>
+                        <a:t>wsl --system -d Ubuntu-20.04 df -h /mnt/wslg/distro</a:t>
+                      </a:r>
+                      <a:endParaRPr lang="zh-CN" altLang="en-US"/>
+                    </a:p>
+                  </a:txBody>
+                  <a:tcPr anchor="ctr" anchorCtr="0"/>
+                </a:tc>
+                <a:tc>
+                  <a:txBody>
+                    <a:bodyPr/>
+                    <a:p>
+                      <a:pPr>
+                        <a:buNone/>
+                      </a:pPr>
+                      <a:r>
+                        <a:rPr lang="en-US" altLang="zh-CN"/>
+                        <a:t>Disk usage for a distribution</a:t>
+                      </a:r>
+                      <a:endParaRPr lang="en-US" altLang="zh-CN"/>
+                    </a:p>
+                  </a:txBody>
+                  <a:tcPr anchor="ctr" anchorCtr="0"/>
+                </a:tc>
+                <a:tc>
+                  <a:txBody>
+                    <a:bodyPr/>
+                    <a:p>
+                      <a:pPr>
+                        <a:buNone/>
+                      </a:pPr>
+                      <a:endParaRPr lang="zh-CN" altLang="en-US"/>
+                    </a:p>
+                  </a:txBody>
+                  <a:tcPr anchor="ctr" anchorCtr="0"/>
+                </a:tc>
+              </a:tr>
             </a:tbl>
           </a:graphicData>
         </a:graphic>
@@ -5851,7 +5656,7 @@
         </p:spPr>
         <p:txBody>
           <a:bodyPr>
-            <a:normAutofit/>
+            <a:normAutofit lnSpcReduction="10000"/>
           </a:bodyPr>
           <a:p>
             <a:r>
@@ -5971,6 +5776,22 @@
               <a:t>detach vdisk</a:t>
             </a:r>
             <a:endParaRPr lang="en-US" altLang="zh-CN" sz="1600"/>
+          </a:p>
+          <a:p>
+            <a:pPr lvl="0"/>
+            <a:r>
+              <a:rPr lang="zh-CN" altLang="en-US" sz="2130"/>
+              <a:t>迁移</a:t>
+            </a:r>
+            <a:endParaRPr lang="zh-CN" altLang="en-US" sz="2130"/>
+          </a:p>
+          <a:p>
+            <a:pPr lvl="1"/>
+            <a:r>
+              <a:rPr lang="en-US" altLang="zh-CN" sz="1775"/>
+              <a:t>first export, then import</a:t>
+            </a:r>
+            <a:endParaRPr lang="en-US" altLang="zh-CN" sz="1775"/>
           </a:p>
         </p:txBody>
       </p:sp>
@@ -6637,14 +6458,6 @@
 
 <file path=ppt/tags/tag24.xml><?xml version="1.0" encoding="utf-8"?>
 <p:tagLst xmlns:p="http://schemas.openxmlformats.org/presentationml/2006/main">
-  <p:tag name="KSO_WM_BEAUTIFY_FLAG" val="#wm#"/>
-  <p:tag name="KSO_WM_TEMPLATE_CATEGORY" val="custom"/>
-  <p:tag name="KSO_WM_TEMPLATE_INDEX" val="160402"/>
-</p:tagLst>
-</file>
-
-<file path=ppt/tags/tag25.xml><?xml version="1.0" encoding="utf-8"?>
-<p:tagLst xmlns:p="http://schemas.openxmlformats.org/presentationml/2006/main">
   <p:tag name="COMMONDATA" val="eyJoZGlkIjoiYjRhZjQ5NWVmZmQxNmM3NmNkNDYxNWRmNzNmMjA1ZDAifQ=="/>
   <p:tag name="KSO_WPP_MARK_KEY" val="4a1a885f-1ec6-43c3-80e1-c5ff2134d3c6"/>
 </p:tagLst>
@@ -6737,7 +6550,7 @@
 
 <file path=ppt/tags/tag9.xml><?xml version="1.0" encoding="utf-8"?>
 <p:tagLst xmlns:p="http://schemas.openxmlformats.org/presentationml/2006/main">
-  <p:tag name="KSO_WM_UNIT_TABLE_BEAUTIFY" val="smartTable{8c134ad6-4265-4557-889e-f682acb320a6}"/>
+  <p:tag name="KSO_WM_UNIT_TABLE_BEAUTIFY" val="smartTable{783cf1b9-3d7a-4d44-a888-3c0396b45c37}"/>
   <p:tag name="TABLE_ENDDRAG_ORIGIN_RECT" val="821*243"/>
   <p:tag name="TABLE_ENDDRAG_RECT" val="72*100*821*243"/>
 </p:tagLst>

--- a/Linux/WSL_Notes.pptx
+++ b/Linux/WSL_Notes.pptx
@@ -8,7 +8,7 @@
     <p:notesMasterId r:id="rId4"/>
   </p:notesMasterIdLst>
   <p:handoutMasterIdLst>
-    <p:handoutMasterId r:id="rId21"/>
+    <p:handoutMasterId r:id="rId22"/>
   </p:handoutMasterIdLst>
   <p:sldIdLst>
     <p:sldId id="256" r:id="rId3"/>
@@ -27,12 +27,13 @@
     <p:sldId id="304" r:id="rId17"/>
     <p:sldId id="286" r:id="rId18"/>
     <p:sldId id="288" r:id="rId19"/>
-    <p:sldId id="279" r:id="rId20"/>
+    <p:sldId id="305" r:id="rId20"/>
+    <p:sldId id="279" r:id="rId21"/>
   </p:sldIdLst>
   <p:sldSz cx="12192000" cy="6858000"/>
   <p:notesSz cx="6858000" cy="9144000"/>
   <p:custDataLst>
-    <p:tags r:id="rId25"/>
+    <p:tags r:id="rId26"/>
   </p:custDataLst>
   <p:defaultTextStyle>
     <a:defPPr>
@@ -3878,21 +3879,121 @@
         </p:nvSpPr>
         <p:spPr/>
         <p:txBody>
-          <a:bodyPr/>
-          <a:p>
-            <a:r>
-              <a:rPr lang="en-US" altLang="zh-CN"/>
+          <a:bodyPr>
+            <a:normAutofit/>
+          </a:bodyPr>
+          <a:p>
+            <a:r>
+              <a:rPr lang="en-US" altLang="zh-CN" sz="1800"/>
               <a:t>Access Windows local host</a:t>
             </a:r>
-            <a:endParaRPr lang="en-US" altLang="zh-CN"/>
+            <a:endParaRPr lang="en-US" altLang="zh-CN" sz="1800"/>
           </a:p>
           <a:p>
             <a:pPr lvl="1"/>
             <a:r>
-              <a:rPr lang="en-US" altLang="zh-CN"/>
+              <a:rPr lang="en-US" altLang="zh-CN" sz="1600"/>
               <a:t>cat /etc/resolve.conf</a:t>
             </a:r>
-            <a:endParaRPr lang="en-US" altLang="zh-CN"/>
+            <a:endParaRPr lang="en-US" altLang="zh-CN" sz="1600"/>
+          </a:p>
+          <a:p>
+            <a:pPr lvl="0"/>
+            <a:r>
+              <a:rPr lang="en-US" altLang="zh-CN" sz="1800"/>
+              <a:t>Make port in WLS2 accessable by LAN</a:t>
+            </a:r>
+            <a:endParaRPr lang="en-US" altLang="zh-CN" sz="1800"/>
+          </a:p>
+          <a:p>
+            <a:pPr lvl="1"/>
+            <a:r>
+              <a:rPr lang="en-US" altLang="zh-CN" sz="1600">
+                <a:sym typeface="+mn-ea"/>
+              </a:rPr>
+              <a:t>get ip address in WSL2</a:t>
+            </a:r>
+            <a:endParaRPr lang="en-US" altLang="zh-CN" sz="1600">
+              <a:sym typeface="+mn-ea"/>
+            </a:endParaRPr>
+          </a:p>
+          <a:p>
+            <a:pPr lvl="2"/>
+            <a:r>
+              <a:rPr lang="en-US" altLang="zh-CN" sz="1400"/>
+              <a:t>hostname -I # e.g. 172.31.11.138</a:t>
+            </a:r>
+            <a:endParaRPr lang="en-US" altLang="zh-CN" sz="1400"/>
+          </a:p>
+          <a:p>
+            <a:pPr lvl="1"/>
+            <a:r>
+              <a:rPr lang="en-US" altLang="zh-CN" sz="1600">
+                <a:sym typeface="+mn-ea"/>
+              </a:rPr>
+              <a:t>Forward Port from Windows to WSL2</a:t>
+            </a:r>
+            <a:endParaRPr lang="en-US" altLang="zh-CN" sz="1600">
+              <a:sym typeface="+mn-ea"/>
+            </a:endParaRPr>
+          </a:p>
+          <a:p>
+            <a:pPr lvl="2"/>
+            <a:r>
+              <a:rPr lang="en-US" altLang="zh-CN" sz="1440"/>
+              <a:t>run command in powershell (Administrator)</a:t>
+            </a:r>
+            <a:endParaRPr lang="en-US" altLang="zh-CN" sz="1440"/>
+          </a:p>
+          <a:p>
+            <a:pPr lvl="2"/>
+            <a:r>
+              <a:rPr lang="en-US" altLang="zh-CN" sz="1400"/>
+              <a:t># Replace: - 8080 with your port  - </a:t>
+            </a:r>
+            <a:r>
+              <a:rPr lang="en-US" altLang="zh-CN" sz="1400">
+                <a:sym typeface="+mn-ea"/>
+              </a:rPr>
+              <a:t>172.31.11.138</a:t>
+            </a:r>
+            <a:r>
+              <a:rPr lang="en-US" altLang="zh-CN" sz="1400"/>
+              <a:t> with your WSL2 IP</a:t>
+            </a:r>
+            <a:endParaRPr lang="en-US" altLang="zh-CN" sz="1400"/>
+          </a:p>
+          <a:p>
+            <a:pPr lvl="2"/>
+            <a:r>
+              <a:rPr lang="en-US" altLang="zh-CN" sz="1400"/>
+              <a:t>netsh interface portproxy add v4tov4 listenport=8443 listenaddress=0.0.0.0 connectport=8443 connectaddress=</a:t>
+            </a:r>
+            <a:r>
+              <a:rPr lang="en-US" altLang="zh-CN" sz="1400">
+                <a:sym typeface="+mn-ea"/>
+              </a:rPr>
+              <a:t>172.31.11.138</a:t>
+            </a:r>
+            <a:endParaRPr lang="en-US" altLang="zh-CN" sz="1400">
+              <a:sym typeface="+mn-ea"/>
+            </a:endParaRPr>
+          </a:p>
+          <a:p>
+            <a:pPr lvl="1"/>
+            <a:r>
+              <a:rPr lang="en-US" altLang="zh-CN" sz="1600"/>
+              <a:t>allow port in Windows firewall</a:t>
+            </a:r>
+            <a:endParaRPr lang="en-US" altLang="zh-CN" sz="1600"/>
+          </a:p>
+          <a:p>
+            <a:pPr lvl="2"/>
+            <a:r>
+              <a:rPr lang="en-US" altLang="zh-CN" sz="1400"/>
+              <a:t>New-NetFirewallRule -DisplayName "WSL2 Docker Port 8443" -Direction Inbound -Action Allow -Protocol TCP -LocalPort 8443</a:t>
+            </a:r>
+            <a:endParaRPr lang="en-US" altLang="zh-CN" sz="1400"/>
           </a:p>
         </p:txBody>
       </p:sp>
@@ -4642,103 +4743,384 @@
             <p:ph idx="1"/>
           </p:nvPr>
         </p:nvSpPr>
-        <p:spPr/>
-        <p:txBody>
-          <a:bodyPr/>
-          <a:p>
-            <a:r>
-              <a:rPr lang="en-US" altLang="zh-CN"/>
+        <p:spPr>
+          <a:xfrm>
+            <a:off x="838200" y="1211580"/>
+            <a:ext cx="5257800" cy="5282565"/>
+          </a:xfrm>
+        </p:spPr>
+        <p:txBody>
+          <a:bodyPr>
+            <a:noAutofit/>
+          </a:bodyPr>
+          <a:p>
+            <a:r>
+              <a:rPr lang="en-US" altLang="zh-CN" sz="1400"/>
               <a:t>Export</a:t>
             </a:r>
-            <a:endParaRPr lang="en-US" altLang="zh-CN"/>
+            <a:endParaRPr lang="en-US" altLang="zh-CN" sz="1400"/>
           </a:p>
           <a:p>
             <a:pPr lvl="1"/>
             <a:r>
-              <a:rPr lang="en-US" altLang="zh-CN"/>
+              <a:rPr lang="en-US" altLang="zh-CN" sz="1200"/>
               <a:t>wsl --list --verbose	// get linux distribution name</a:t>
             </a:r>
-            <a:endParaRPr lang="en-US" altLang="zh-CN"/>
+            <a:endParaRPr lang="en-US" altLang="zh-CN" sz="1200"/>
           </a:p>
           <a:p>
             <a:pPr lvl="1"/>
             <a:r>
-              <a:rPr lang="en-US" altLang="zh-CN"/>
+              <a:rPr lang="en-US" altLang="zh-CN" sz="1200"/>
               <a:t>wsl --shutdown</a:t>
             </a:r>
-            <a:endParaRPr lang="en-US" altLang="zh-CN"/>
+            <a:endParaRPr lang="en-US" altLang="zh-CN" sz="1200"/>
           </a:p>
           <a:p>
             <a:pPr lvl="1"/>
             <a:r>
-              <a:rPr lang="en-US" altLang="zh-CN"/>
+              <a:rPr lang="en-US" altLang="zh-CN" sz="1200"/>
               <a:t>mkdir D:\backup</a:t>
             </a:r>
-            <a:endParaRPr lang="en-US" altLang="zh-CN"/>
+            <a:endParaRPr lang="en-US" altLang="zh-CN" sz="1200"/>
           </a:p>
           <a:p>
             <a:pPr lvl="1"/>
             <a:r>
-              <a:rPr lang="en-US" altLang="zh-CN"/>
+              <a:rPr lang="en-US" altLang="zh-CN" sz="1200"/>
               <a:t>wsl --export {Ubuntu-18.04} D:\backup\ubuntu-18.04.tar</a:t>
             </a:r>
-            <a:endParaRPr lang="en-US" altLang="zh-CN"/>
+            <a:endParaRPr lang="en-US" altLang="zh-CN" sz="1200"/>
           </a:p>
           <a:p>
             <a:pPr lvl="1"/>
             <a:r>
-              <a:rPr lang="en-US" altLang="zh-CN"/>
+              <a:rPr lang="en-US" altLang="zh-CN" sz="1200"/>
               <a:t>wsl --unregister {Ubuntu-18.04}</a:t>
             </a:r>
-            <a:endParaRPr lang="en-US" altLang="zh-CN"/>
+            <a:endParaRPr lang="en-US" altLang="zh-CN" sz="1200"/>
           </a:p>
           <a:p>
             <a:pPr lvl="0"/>
             <a:r>
-              <a:rPr lang="en-US" altLang="zh-CN" sz="2400"/>
+              <a:rPr lang="en-US" altLang="zh-CN" sz="1400"/>
               <a:t>Import</a:t>
             </a:r>
-            <a:endParaRPr lang="en-US" altLang="zh-CN"/>
+            <a:endParaRPr lang="en-US" altLang="zh-CN" sz="1400"/>
           </a:p>
           <a:p>
             <a:pPr lvl="1"/>
             <a:r>
-              <a:rPr lang="en-US" altLang="zh-CN"/>
+              <a:rPr lang="en-US" altLang="zh-CN" sz="1200"/>
               <a:t>mkdir D:\WSL\</a:t>
             </a:r>
-            <a:endParaRPr lang="en-US" altLang="zh-CN"/>
+            <a:endParaRPr lang="en-US" altLang="zh-CN" sz="1200"/>
           </a:p>
           <a:p>
             <a:pPr lvl="1"/>
             <a:r>
-              <a:rPr lang="en-US" altLang="zh-CN"/>
+              <a:rPr lang="en-US" altLang="zh-CN" sz="1200"/>
               <a:t>wsl --import {Ubuntu-18.04} D:\WSL\ D:\backup\ubuntu-18.04.tar</a:t>
             </a:r>
-            <a:endParaRPr lang="en-US" altLang="zh-CN"/>
+            <a:endParaRPr lang="en-US" altLang="zh-CN" sz="1200"/>
           </a:p>
           <a:p>
             <a:pPr lvl="1"/>
             <a:r>
-              <a:rPr lang="en-US" altLang="zh-CN"/>
+              <a:rPr lang="en-US" altLang="zh-CN" sz="1200"/>
               <a:t>cd $env:USERPROFILE\AppData\Local\Microsoft\WindowsApps</a:t>
             </a:r>
-            <a:endParaRPr lang="en-US" altLang="zh-CN"/>
+            <a:endParaRPr lang="en-US" altLang="zh-CN" sz="1200"/>
           </a:p>
           <a:p>
             <a:pPr lvl="1"/>
             <a:r>
-              <a:rPr lang="en-US" altLang="zh-CN"/>
+              <a:rPr lang="en-US" altLang="zh-CN" sz="1200"/>
               <a:t>.\ubuntu1804.exe config --default-user lgm</a:t>
             </a:r>
-            <a:endParaRPr lang="en-US" altLang="zh-CN"/>
+            <a:endParaRPr lang="en-US" altLang="zh-CN" sz="1200"/>
           </a:p>
           <a:p>
             <a:pPr lvl="1"/>
             <a:r>
-              <a:rPr lang="en-US" altLang="zh-CN"/>
+              <a:rPr lang="en-US" altLang="zh-CN" sz="1200"/>
               <a:t>wsl --distribution {Ubuntu-18.04}</a:t>
             </a:r>
-            <a:endParaRPr lang="en-US" altLang="zh-CN"/>
+            <a:endParaRPr lang="en-US" altLang="zh-CN" sz="1200"/>
+          </a:p>
+          <a:p>
+            <a:pPr lvl="0"/>
+            <a:r>
+              <a:rPr lang="en-US" altLang="zh-CN" sz="1400"/>
+              <a:t>Change .vhdx position</a:t>
+            </a:r>
+            <a:endParaRPr lang="en-US" altLang="zh-CN" sz="1400"/>
+          </a:p>
+          <a:p>
+            <a:pPr lvl="1"/>
+            <a:r>
+              <a:rPr lang="en-US" altLang="zh-CN" sz="1200"/>
+              <a:t>wsl --export Ubuntu-20.04 D:\wsl-backup\ubuntu2004.tar</a:t>
+            </a:r>
+            <a:endParaRPr lang="en-US" altLang="zh-CN" sz="1200"/>
+          </a:p>
+          <a:p>
+            <a:pPr lvl="1"/>
+            <a:r>
+              <a:rPr lang="en-US" altLang="zh-CN" sz="1200"/>
+              <a:t>wsl --unregister Ubuntu-20.04</a:t>
+            </a:r>
+            <a:endParaRPr lang="en-US" altLang="zh-CN" sz="1200"/>
+          </a:p>
+          <a:p>
+            <a:pPr lvl="1"/>
+            <a:r>
+              <a:rPr lang="en-US" altLang="zh-CN" sz="1200"/>
+              <a:t>wsl --import Ubuntu-20.04 D:\wsl-distros\Ubuntu2004 D:\wsl-backup\ubuntu2004.tar --version 2</a:t>
+            </a:r>
+            <a:endParaRPr lang="en-US" altLang="zh-CN" sz="1200"/>
+          </a:p>
+          <a:p>
+            <a:pPr lvl="1"/>
+            <a:r>
+              <a:rPr lang="en-US" altLang="zh-CN" sz="1200"/>
+              <a:t>after import, default user is root, need to add user</a:t>
+            </a:r>
+            <a:endParaRPr lang="en-US" altLang="zh-CN" sz="1200"/>
+          </a:p>
+          <a:p>
+            <a:pPr lvl="2"/>
+            <a:r>
+              <a:rPr lang="en-US" altLang="zh-CN" sz="1000"/>
+              <a:t>export USER=yourusername</a:t>
+            </a:r>
+            <a:endParaRPr lang="en-US" altLang="zh-CN" sz="1000"/>
+          </a:p>
+          <a:p>
+            <a:pPr lvl="2"/>
+            <a:r>
+              <a:rPr lang="en-US" altLang="zh-CN" sz="1000"/>
+              <a:t>echo "[user]" &gt; /etc/wsl.conf</a:t>
+            </a:r>
+            <a:endParaRPr lang="en-US" altLang="zh-CN" sz="1000"/>
+          </a:p>
+          <a:p>
+            <a:pPr lvl="2"/>
+            <a:r>
+              <a:rPr lang="en-US" altLang="zh-CN" sz="1000"/>
+              <a:t>echo "default=$USER" &gt;&gt; /etc/wsl.conf</a:t>
+            </a:r>
+            <a:endParaRPr lang="en-US" altLang="zh-CN" sz="1000"/>
+          </a:p>
+          <a:p>
+            <a:pPr lvl="2"/>
+            <a:r>
+              <a:rPr lang="en-US" altLang="zh-CN" sz="1000"/>
+              <a:t>restart wsl distribution</a:t>
+            </a:r>
+            <a:endParaRPr lang="en-US" altLang="zh-CN" sz="1000"/>
+          </a:p>
+        </p:txBody>
+      </p:sp>
+      <p:sp>
+        <p:nvSpPr>
+          <p:cNvPr id="4" name="内容占位符 2"/>
+          <p:cNvSpPr>
+            <a:spLocks noGrp="1"/>
+          </p:cNvSpPr>
+          <p:nvPr/>
+        </p:nvSpPr>
+        <p:spPr>
+          <a:xfrm>
+            <a:off x="6499860" y="1211580"/>
+            <a:ext cx="5257800" cy="5282565"/>
+          </a:xfrm>
+          <a:prstGeom prst="rect">
+            <a:avLst/>
+          </a:prstGeom>
+        </p:spPr>
+        <p:txBody>
+          <a:bodyPr vert="horz" lIns="91440" tIns="45720" rIns="91440" bIns="45720" rtlCol="0">
+            <a:noAutofit/>
+          </a:bodyPr>
+          <a:lstStyle>
+            <a:lvl1pPr marL="342900" indent="-342900" algn="l" defTabSz="914400" rtl="0" eaLnBrk="1" latinLnBrk="0" hangingPunct="1">
+              <a:lnSpc>
+                <a:spcPct val="90000"/>
+              </a:lnSpc>
+              <a:spcBef>
+                <a:spcPts val="1000"/>
+              </a:spcBef>
+              <a:buFont typeface="黑体" panose="02010609060101010101" pitchFamily="49" charset="-122"/>
+              <a:buChar char="〉"/>
+              <a:defRPr sz="2400" kern="1200">
+                <a:solidFill>
+                  <a:schemeClr val="tx1"/>
+                </a:solidFill>
+                <a:latin typeface="+mn-lt"/>
+                <a:ea typeface="+mn-ea"/>
+                <a:cs typeface="+mn-cs"/>
+              </a:defRPr>
+            </a:lvl1pPr>
+            <a:lvl2pPr marL="800100" indent="-342900" algn="l" defTabSz="914400" rtl="0" eaLnBrk="1" latinLnBrk="0" hangingPunct="1">
+              <a:lnSpc>
+                <a:spcPct val="90000"/>
+              </a:lnSpc>
+              <a:spcBef>
+                <a:spcPts val="500"/>
+              </a:spcBef>
+              <a:buFont typeface="Arial" panose="020B0604020202020204" pitchFamily="34" charset="0"/>
+              <a:buChar char="•"/>
+              <a:defRPr sz="2000" kern="1200">
+                <a:solidFill>
+                  <a:schemeClr val="tx1"/>
+                </a:solidFill>
+                <a:latin typeface="+mn-lt"/>
+                <a:ea typeface="+mn-ea"/>
+                <a:cs typeface="+mn-cs"/>
+              </a:defRPr>
+            </a:lvl2pPr>
+            <a:lvl3pPr marL="1257300" indent="-342900" algn="l" defTabSz="914400" rtl="0" eaLnBrk="1" latinLnBrk="0" hangingPunct="1">
+              <a:lnSpc>
+                <a:spcPct val="90000"/>
+              </a:lnSpc>
+              <a:spcBef>
+                <a:spcPts val="500"/>
+              </a:spcBef>
+              <a:buFont typeface="Arial" panose="020B0604020202020204" pitchFamily="34" charset="0"/>
+              <a:buChar char="•"/>
+              <a:defRPr sz="1800" kern="1200">
+                <a:solidFill>
+                  <a:schemeClr val="tx1"/>
+                </a:solidFill>
+                <a:latin typeface="+mn-lt"/>
+                <a:ea typeface="+mn-ea"/>
+                <a:cs typeface="+mn-cs"/>
+              </a:defRPr>
+            </a:lvl3pPr>
+            <a:lvl4pPr marL="1657350" indent="-285750" algn="l" defTabSz="914400" rtl="0" eaLnBrk="1" latinLnBrk="0" hangingPunct="1">
+              <a:lnSpc>
+                <a:spcPct val="90000"/>
+              </a:lnSpc>
+              <a:spcBef>
+                <a:spcPts val="500"/>
+              </a:spcBef>
+              <a:buFont typeface="Arial" panose="020B0604020202020204" pitchFamily="34" charset="0"/>
+              <a:buChar char="•"/>
+              <a:defRPr sz="1800" kern="1200">
+                <a:solidFill>
+                  <a:schemeClr val="tx1"/>
+                </a:solidFill>
+                <a:latin typeface="+mn-lt"/>
+                <a:ea typeface="+mn-ea"/>
+                <a:cs typeface="+mn-cs"/>
+              </a:defRPr>
+            </a:lvl4pPr>
+            <a:lvl5pPr marL="2114550" indent="-285750" algn="l" defTabSz="914400" rtl="0" eaLnBrk="1" latinLnBrk="0" hangingPunct="1">
+              <a:lnSpc>
+                <a:spcPct val="90000"/>
+              </a:lnSpc>
+              <a:spcBef>
+                <a:spcPts val="500"/>
+              </a:spcBef>
+              <a:buFont typeface="Arial" panose="020B0604020202020204" pitchFamily="34" charset="0"/>
+              <a:buChar char="•"/>
+              <a:defRPr sz="1800" kern="1200">
+                <a:solidFill>
+                  <a:schemeClr val="tx1"/>
+                </a:solidFill>
+                <a:latin typeface="+mn-lt"/>
+                <a:ea typeface="+mn-ea"/>
+                <a:cs typeface="+mn-cs"/>
+              </a:defRPr>
+            </a:lvl5pPr>
+            <a:lvl6pPr marL="2514600" indent="-228600" algn="l" defTabSz="914400" rtl="0" eaLnBrk="1" latinLnBrk="0" hangingPunct="1">
+              <a:lnSpc>
+                <a:spcPct val="90000"/>
+              </a:lnSpc>
+              <a:spcBef>
+                <a:spcPts val="500"/>
+              </a:spcBef>
+              <a:buFont typeface="Arial" panose="020B0604020202020204" pitchFamily="34" charset="0"/>
+              <a:buChar char="•"/>
+              <a:defRPr sz="1800" kern="1200">
+                <a:solidFill>
+                  <a:schemeClr val="tx1"/>
+                </a:solidFill>
+                <a:latin typeface="+mn-lt"/>
+                <a:ea typeface="+mn-ea"/>
+                <a:cs typeface="+mn-cs"/>
+              </a:defRPr>
+            </a:lvl6pPr>
+            <a:lvl7pPr marL="2971800" indent="-228600" algn="l" defTabSz="914400" rtl="0" eaLnBrk="1" latinLnBrk="0" hangingPunct="1">
+              <a:lnSpc>
+                <a:spcPct val="90000"/>
+              </a:lnSpc>
+              <a:spcBef>
+                <a:spcPts val="500"/>
+              </a:spcBef>
+              <a:buFont typeface="Arial" panose="020B0604020202020204" pitchFamily="34" charset="0"/>
+              <a:buChar char="•"/>
+              <a:defRPr sz="1800" kern="1200">
+                <a:solidFill>
+                  <a:schemeClr val="tx1"/>
+                </a:solidFill>
+                <a:latin typeface="+mn-lt"/>
+                <a:ea typeface="+mn-ea"/>
+                <a:cs typeface="+mn-cs"/>
+              </a:defRPr>
+            </a:lvl7pPr>
+            <a:lvl8pPr marL="3429000" indent="-228600" algn="l" defTabSz="914400" rtl="0" eaLnBrk="1" latinLnBrk="0" hangingPunct="1">
+              <a:lnSpc>
+                <a:spcPct val="90000"/>
+              </a:lnSpc>
+              <a:spcBef>
+                <a:spcPts val="500"/>
+              </a:spcBef>
+              <a:buFont typeface="Arial" panose="020B0604020202020204" pitchFamily="34" charset="0"/>
+              <a:buChar char="•"/>
+              <a:defRPr sz="1800" kern="1200">
+                <a:solidFill>
+                  <a:schemeClr val="tx1"/>
+                </a:solidFill>
+                <a:latin typeface="+mn-lt"/>
+                <a:ea typeface="+mn-ea"/>
+                <a:cs typeface="+mn-cs"/>
+              </a:defRPr>
+            </a:lvl8pPr>
+            <a:lvl9pPr marL="3886200" indent="-228600" algn="l" defTabSz="914400" rtl="0" eaLnBrk="1" latinLnBrk="0" hangingPunct="1">
+              <a:lnSpc>
+                <a:spcPct val="90000"/>
+              </a:lnSpc>
+              <a:spcBef>
+                <a:spcPts val="500"/>
+              </a:spcBef>
+              <a:buFont typeface="Arial" panose="020B0604020202020204" pitchFamily="34" charset="0"/>
+              <a:buChar char="•"/>
+              <a:defRPr sz="1800" kern="1200">
+                <a:solidFill>
+                  <a:schemeClr val="tx1"/>
+                </a:solidFill>
+                <a:latin typeface="+mn-lt"/>
+                <a:ea typeface="+mn-ea"/>
+                <a:cs typeface="+mn-cs"/>
+              </a:defRPr>
+            </a:lvl9pPr>
+          </a:lstStyle>
+          <a:p>
+            <a:r>
+              <a:rPr lang="en-US" altLang="zh-CN" sz="1800"/>
+              <a:t>Launch .vhdx</a:t>
+            </a:r>
+            <a:endParaRPr lang="en-US" altLang="zh-CN" sz="1800"/>
+          </a:p>
+          <a:p>
+            <a:pPr lvl="1"/>
+            <a:r>
+              <a:rPr lang="en-US" altLang="zh-CN" sz="1400"/>
+              <a:t>wsl --import --vhd MyUbuntu C:\WSL\MyUbuntu\ C:\WSL\MyUbuntu\ext4.vhdx --version 2</a:t>
+            </a:r>
+            <a:endParaRPr lang="en-US" altLang="zh-CN" sz="1400"/>
           </a:p>
         </p:txBody>
       </p:sp>
@@ -4754,6 +5136,166 @@
 </file>
 
 <file path=ppt/slides/slide17.xml><?xml version="1.0" encoding="utf-8"?>
+<p:sld xmlns:a="http://schemas.openxmlformats.org/drawingml/2006/main" xmlns:r="http://schemas.openxmlformats.org/officeDocument/2006/relationships" xmlns:p="http://schemas.openxmlformats.org/presentationml/2006/main">
+  <p:cSld>
+    <p:spTree>
+      <p:nvGrpSpPr>
+        <p:cNvPr id="1" name=""/>
+        <p:cNvGrpSpPr/>
+        <p:nvPr/>
+      </p:nvGrpSpPr>
+      <p:grpSpPr/>
+      <p:sp>
+        <p:nvSpPr>
+          <p:cNvPr id="2" name="标题 1"/>
+          <p:cNvSpPr>
+            <a:spLocks noGrp="1"/>
+          </p:cNvSpPr>
+          <p:nvPr>
+            <p:ph type="title"/>
+          </p:nvPr>
+        </p:nvSpPr>
+        <p:spPr/>
+        <p:txBody>
+          <a:bodyPr/>
+          <a:p>
+            <a:r>
+              <a:rPr lang="en-US" altLang="zh-CN"/>
+              <a:t>Decrease WSL2 Disk Size</a:t>
+            </a:r>
+            <a:endParaRPr lang="en-US" altLang="zh-CN"/>
+          </a:p>
+        </p:txBody>
+      </p:sp>
+      <p:sp>
+        <p:nvSpPr>
+          <p:cNvPr id="3" name="内容占位符 2"/>
+          <p:cNvSpPr>
+            <a:spLocks noGrp="1"/>
+          </p:cNvSpPr>
+          <p:nvPr>
+            <p:ph idx="1"/>
+          </p:nvPr>
+        </p:nvSpPr>
+        <p:spPr>
+          <a:xfrm>
+            <a:off x="838200" y="1211580"/>
+            <a:ext cx="5142230" cy="4549140"/>
+          </a:xfrm>
+        </p:spPr>
+        <p:txBody>
+          <a:bodyPr>
+            <a:normAutofit lnSpcReduction="20000"/>
+          </a:bodyPr>
+          <a:p>
+            <a:r>
+              <a:rPr lang="en-US" altLang="zh-CN" sz="2000"/>
+              <a:t>Disk file</a:t>
+            </a:r>
+            <a:endParaRPr lang="en-US" altLang="zh-CN" sz="2000"/>
+          </a:p>
+          <a:p>
+            <a:pPr lvl="1"/>
+            <a:r>
+              <a:rPr lang="en-US" altLang="zh-CN" sz="1800"/>
+              <a:t>C:\Users\{username}\AppData\Local\Packages\CanonicalGroupLimited.Ubuntu20.04LTS_79rhkp1fndgsc\LocalState</a:t>
+            </a:r>
+            <a:endParaRPr lang="en-US" altLang="zh-CN" sz="1800"/>
+          </a:p>
+          <a:p>
+            <a:pPr lvl="0"/>
+            <a:r>
+              <a:rPr lang="en-US" altLang="zh-CN" sz="2160"/>
+              <a:t>Decrease size</a:t>
+            </a:r>
+            <a:endParaRPr lang="en-US" altLang="zh-CN" sz="2160"/>
+          </a:p>
+          <a:p>
+            <a:pPr lvl="1"/>
+            <a:r>
+              <a:rPr lang="en-US" altLang="zh-CN" sz="1800"/>
+              <a:t>wsl --shutdown</a:t>
+            </a:r>
+            <a:endParaRPr lang="en-US" altLang="zh-CN" sz="1800"/>
+          </a:p>
+          <a:p>
+            <a:pPr lvl="1"/>
+            <a:r>
+              <a:rPr lang="en-US" altLang="zh-CN" sz="1800"/>
+              <a:t>diskpart</a:t>
+            </a:r>
+            <a:endParaRPr lang="en-US" altLang="zh-CN" sz="1800"/>
+          </a:p>
+          <a:p>
+            <a:pPr lvl="2"/>
+            <a:r>
+              <a:rPr lang="en-US" altLang="zh-CN" sz="1620"/>
+              <a:t>select vdisk file=”C:\Users\{username}\AppData\Local\Packages\CanonicalGroupLimited.Ubuntu20.04LTS_79rhkp1fndgsc\LocalState”</a:t>
+            </a:r>
+            <a:endParaRPr lang="en-US" altLang="zh-CN" sz="1620"/>
+          </a:p>
+          <a:p>
+            <a:pPr lvl="2"/>
+            <a:r>
+              <a:rPr lang="en-US" altLang="zh-CN" sz="1620"/>
+              <a:t>attach vdisk readonly</a:t>
+            </a:r>
+            <a:endParaRPr lang="en-US" altLang="zh-CN" sz="1620"/>
+          </a:p>
+          <a:p>
+            <a:pPr lvl="2"/>
+            <a:r>
+              <a:rPr lang="en-US" altLang="zh-CN" sz="1620"/>
+              <a:t>compack vdisk</a:t>
+            </a:r>
+            <a:endParaRPr lang="en-US" altLang="zh-CN" sz="1620"/>
+          </a:p>
+          <a:p>
+            <a:pPr lvl="2"/>
+            <a:r>
+              <a:rPr lang="en-US" altLang="zh-CN" sz="1620"/>
+              <a:t>detach vdisk </a:t>
+            </a:r>
+            <a:endParaRPr lang="en-US" altLang="zh-CN" sz="1620"/>
+          </a:p>
+          <a:p>
+            <a:pPr lvl="2"/>
+            <a:r>
+              <a:rPr lang="en-US" altLang="zh-CN" sz="1620"/>
+              <a:t>exit</a:t>
+            </a:r>
+            <a:endParaRPr lang="en-US" altLang="zh-CN" sz="1620"/>
+          </a:p>
+          <a:p>
+            <a:pPr lvl="1"/>
+            <a:r>
+              <a:rPr lang="en-US" altLang="zh-CN" sz="1800"/>
+              <a:t>result</a:t>
+            </a:r>
+            <a:endParaRPr lang="en-US" altLang="zh-CN" sz="1800"/>
+          </a:p>
+          <a:p>
+            <a:pPr lvl="2"/>
+            <a:r>
+              <a:rPr lang="en-US" altLang="zh-CN" sz="1620"/>
+              <a:t>153GB-&gt;144GB</a:t>
+            </a:r>
+            <a:endParaRPr lang="en-US" altLang="zh-CN" sz="1620"/>
+          </a:p>
+        </p:txBody>
+      </p:sp>
+    </p:spTree>
+    <p:custDataLst>
+      <p:tags r:id="rId1"/>
+    </p:custDataLst>
+  </p:cSld>
+  <p:clrMapOvr>
+    <a:masterClrMapping/>
+  </p:clrMapOvr>
+</p:sld>
+</file>
+
+<file path=ppt/slides/slide18.xml><?xml version="1.0" encoding="utf-8"?>
 <p:sld xmlns:a="http://schemas.openxmlformats.org/drawingml/2006/main" xmlns:r="http://schemas.openxmlformats.org/officeDocument/2006/relationships" xmlns:p="http://schemas.openxmlformats.org/presentationml/2006/main">
   <p:cSld>
     <p:spTree>
@@ -5593,6 +6135,94 @@
             </a:r>
             <a:endParaRPr lang="en-US" altLang="zh-CN"/>
           </a:p>
+          <a:p>
+            <a:pPr lvl="1"/>
+            <a:r>
+              <a:rPr lang="zh-CN" altLang="en-US"/>
+              <a:t>使用</a:t>
+            </a:r>
+            <a:r>
+              <a:rPr lang="en-US" altLang="zh-CN"/>
+              <a:t> systemd </a:t>
+            </a:r>
+            <a:r>
+              <a:rPr lang="zh-CN" altLang="en-US"/>
+              <a:t>作为初始化系统（</a:t>
+            </a:r>
+            <a:r>
+              <a:rPr lang="en-US" altLang="zh-CN"/>
+              <a:t>init system</a:t>
+            </a:r>
+            <a:r>
+              <a:rPr lang="zh-CN" altLang="en-US"/>
+              <a:t>），而不是传统的</a:t>
+            </a:r>
+            <a:r>
+              <a:rPr lang="en-US" altLang="zh-CN"/>
+              <a:t> SysV init</a:t>
+            </a:r>
+            <a:endParaRPr lang="en-US" altLang="zh-CN"/>
+          </a:p>
+          <a:p>
+            <a:pPr lvl="2"/>
+            <a:r>
+              <a:rPr lang="en-US" altLang="zh-CN"/>
+              <a:t>[boot]</a:t>
+            </a:r>
+            <a:endParaRPr lang="en-US" altLang="zh-CN"/>
+          </a:p>
+          <a:p>
+            <a:pPr lvl="2"/>
+            <a:r>
+              <a:rPr lang="en-US" altLang="zh-CN"/>
+              <a:t>systemd=true</a:t>
+            </a:r>
+            <a:endParaRPr lang="en-US" altLang="zh-CN"/>
+          </a:p>
+          <a:p>
+            <a:pPr lvl="2"/>
+            <a:r>
+              <a:rPr lang="en-US" altLang="zh-CN"/>
+              <a:t># </a:t>
+            </a:r>
+            <a:r>
+              <a:rPr lang="zh-CN" altLang="en-US"/>
+              <a:t>可以使用</a:t>
+            </a:r>
+            <a:r>
+              <a:rPr lang="en-US" altLang="zh-CN"/>
+              <a:t> systemctl enable/start/stop/status </a:t>
+            </a:r>
+            <a:r>
+              <a:rPr lang="zh-CN" altLang="en-US"/>
+              <a:t>来控制服务</a:t>
+            </a:r>
+            <a:endParaRPr lang="zh-CN" altLang="en-US"/>
+          </a:p>
+          <a:p>
+            <a:pPr lvl="2"/>
+            <a:r>
+              <a:rPr lang="en-US" altLang="zh-CN"/>
+              <a:t># </a:t>
+            </a:r>
+            <a:r>
+              <a:rPr lang="zh-CN" altLang="en-US"/>
+              <a:t>服务会在</a:t>
+            </a:r>
+            <a:r>
+              <a:rPr lang="en-US" altLang="zh-CN"/>
+              <a:t> WSL </a:t>
+            </a:r>
+            <a:r>
+              <a:rPr lang="zh-CN" altLang="en-US"/>
+              <a:t>启动时自动启动（如果已</a:t>
+            </a:r>
+            <a:r>
+              <a:rPr lang="en-US" altLang="zh-CN"/>
+              <a:t> enable)</a:t>
+            </a:r>
+            <a:endParaRPr lang="en-US" altLang="zh-CN"/>
+          </a:p>
         </p:txBody>
       </p:sp>
     </p:spTree>
@@ -5656,7 +6286,7 @@
         </p:spPr>
         <p:txBody>
           <a:bodyPr>
-            <a:normAutofit lnSpcReduction="10000"/>
+            <a:normAutofit/>
           </a:bodyPr>
           <a:p>
             <a:r>
@@ -5725,7 +6355,7 @@
             <a:pPr lvl="1"/>
             <a:r>
               <a:rPr lang="en-US" altLang="zh-CN" sz="1800"/>
-              <a:t>wsl --terminate {Ubuntu-18.04}</a:t>
+              <a:t>wsl --terminate {Ubuntu-18.04}, wsl --shutdown</a:t>
             </a:r>
             <a:endParaRPr lang="en-US" altLang="zh-CN" sz="1800"/>
           </a:p>
@@ -5776,22 +6406,6 @@
               <a:t>detach vdisk</a:t>
             </a:r>
             <a:endParaRPr lang="en-US" altLang="zh-CN" sz="1600"/>
-          </a:p>
-          <a:p>
-            <a:pPr lvl="0"/>
-            <a:r>
-              <a:rPr lang="zh-CN" altLang="en-US" sz="2130"/>
-              <a:t>迁移</a:t>
-            </a:r>
-            <a:endParaRPr lang="zh-CN" altLang="en-US" sz="2130"/>
-          </a:p>
-          <a:p>
-            <a:pPr lvl="1"/>
-            <a:r>
-              <a:rPr lang="en-US" altLang="zh-CN" sz="1775"/>
-              <a:t>first export, then import</a:t>
-            </a:r>
-            <a:endParaRPr lang="en-US" altLang="zh-CN" sz="1775"/>
           </a:p>
         </p:txBody>
       </p:sp>
@@ -6457,6 +7071,14 @@
 </file>
 
 <file path=ppt/tags/tag24.xml><?xml version="1.0" encoding="utf-8"?>
+<p:tagLst xmlns:p="http://schemas.openxmlformats.org/presentationml/2006/main">
+  <p:tag name="KSO_WM_BEAUTIFY_FLAG" val="#wm#"/>
+  <p:tag name="KSO_WM_TEMPLATE_CATEGORY" val="custom"/>
+  <p:tag name="KSO_WM_TEMPLATE_INDEX" val="160402"/>
+</p:tagLst>
+</file>
+
+<file path=ppt/tags/tag25.xml><?xml version="1.0" encoding="utf-8"?>
 <p:tagLst xmlns:p="http://schemas.openxmlformats.org/presentationml/2006/main">
   <p:tag name="COMMONDATA" val="eyJoZGlkIjoiYjRhZjQ5NWVmZmQxNmM3NmNkNDYxNWRmNzNmMjA1ZDAifQ=="/>
   <p:tag name="KSO_WPP_MARK_KEY" val="4a1a885f-1ec6-43c3-80e1-c5ff2134d3c6"/>
